--- a/public/fun/pack/pptx/birthday/돌잔치_30_첫번째이야기중심_빨간우체통.pptx
+++ b/public/fun/pack/pptx/birthday/돌잔치_30_첫번째이야기중심_빨간우체통.pptx
@@ -3286,6 +3286,14 @@
 <file path=ppt/slides/slide1.xml><?xml version="1.0" encoding="utf-8"?>
 <p:sld xmlns:a="http://schemas.openxmlformats.org/drawingml/2006/main" xmlns:p="http://schemas.openxmlformats.org/presentationml/2006/main" xmlns:r="http://schemas.openxmlformats.org/officeDocument/2006/relationships">
   <p:cSld>
+    <p:bg>
+      <p:bgPr>
+        <a:solidFill>
+          <a:srgbClr val="FBEFEC"/>
+        </a:solidFill>
+        <a:effectLst/>
+      </p:bgPr>
+    </p:bg>
     <p:spTree>
       <p:nvGrpSpPr>
         <p:cNvPr id="1" name=""/>
@@ -3293,30 +3301,120 @@
         <p:nvPr/>
       </p:nvGrpSpPr>
       <p:grpSpPr/>
-      <p:pic>
-        <p:nvPicPr>
-          <p:cNvPr id="3" name="표지 그림" descr="birthday-30.jpg"/>
-          <p:cNvPicPr>
-            <a:picLocks noChangeAspect="1"/>
-          </p:cNvPicPr>
+      <p:sp>
+        <p:nvSpPr>
+          <p:cNvPr id="3" name="사진 자리"/>
+          <p:cNvSpPr/>
           <p:nvPr/>
-        </p:nvPicPr>
-        <p:blipFill>
-          <a:blip r:embed="rId2"/>
-          <a:stretch>
-            <a:fillRect/>
-          </a:stretch>
-        </p:blipFill>
-        <p:spPr>
-          <a:xfrm>
-            <a:off x="0" y="0"/>
-            <a:ext cx="12191695" cy="6858000"/>
+        </p:nvSpPr>
+        <p:spPr>
+          <a:xfrm>
+            <a:off x="7071183" y="960120"/>
+            <a:ext cx="3657508" cy="4526280"/>
+          </a:xfrm>
+          <a:prstGeom prst="roundRect">
+            <a:avLst>
+              <a:gd name="adj" fmla="val 4000"/>
+            </a:avLst>
+          </a:prstGeom>
+          <a:solidFill>
+            <a:srgbClr val="EBBAAD"/>
+          </a:solidFill>
+          <a:ln>
+            <a:noFill/>
+          </a:ln>
+        </p:spPr>
+        <p:txBody>
+          <a:bodyPr rtlCol="0" anchor="ctr" wrap="square" lIns="54864" rIns="54864" tIns="27432" bIns="27432">
+            <a:noAutofit/>
+          </a:bodyPr>
+          <a:lstStyle/>
+          <a:p>
+            <a:pPr algn="ctr">
+              <a:lnSpc>
+                <a:spcPct val="100000"/>
+              </a:lnSpc>
+            </a:pPr>
+            <a:r>
+              <a:rPr sz="1400" b="0" i="0">
+                <a:solidFill>
+                  <a:srgbClr val="492E27"/>
+                </a:solidFill>
+              </a:rPr>
+              <a:t>사진을 넣어 주세요</a:t>
+            </a:r>
+          </a:p>
+        </p:txBody>
+      </p:sp>
+      <p:sp>
+        <p:nvSpPr>
+          <p:cNvPr id="4" name="장식"/>
+          <p:cNvSpPr/>
+          <p:nvPr/>
+        </p:nvSpPr>
+        <p:spPr>
+          <a:xfrm>
+            <a:off x="7558851" y="1234439"/>
+            <a:ext cx="3657508" cy="4526280"/>
+          </a:xfrm>
+          <a:prstGeom prst="roundRect">
+            <a:avLst>
+              <a:gd name="adj" fmla="val 4000"/>
+            </a:avLst>
+          </a:prstGeom>
+          <a:noFill/>
+          <a:ln w="9525">
+            <a:solidFill>
+              <a:srgbClr val="26231F"/>
+            </a:solidFill>
+          </a:ln>
+        </p:spPr>
+        <p:txBody>
+          <a:bodyPr rtlCol="0" anchor="ctr"/>
+          <a:lstStyle/>
+          <a:p>
+            <a:pPr algn="ctr"/>
+          </a:p>
+        </p:txBody>
+      </p:sp>
+      <p:sp>
+        <p:nvSpPr>
+          <p:cNvPr id="5" name="라벨"/>
+          <p:cNvSpPr txBox="1"/>
+          <p:nvPr/>
+        </p:nvSpPr>
+        <p:spPr>
+          <a:xfrm>
+            <a:off x="822960" y="2148840"/>
+            <a:ext cx="5608179" cy="274320"/>
           </a:xfrm>
           <a:prstGeom prst="rect">
             <a:avLst/>
           </a:prstGeom>
-        </p:spPr>
-      </p:pic>
+          <a:noFill/>
+        </p:spPr>
+        <p:txBody>
+          <a:bodyPr wrap="square" lIns="54864" rIns="54864" tIns="27432" bIns="27432" anchor="t">
+            <a:noAutofit/>
+          </a:bodyPr>
+          <a:lstStyle/>
+          <a:p>
+            <a:pPr algn="l">
+              <a:lnSpc>
+                <a:spcPct val="115000"/>
+              </a:lnSpc>
+            </a:pPr>
+            <a:r>
+              <a:rPr sz="1000" b="1" i="0" spc="250">
+                <a:solidFill>
+                  <a:srgbClr val="26231F"/>
+                </a:solidFill>
+              </a:rPr>
+              <a:t>FIRST BIRTHDAY</a:t>
+            </a:r>
+          </a:p>
+        </p:txBody>
+      </p:sp>
       <p:sp>
         <p:nvSpPr>
           <p:cNvPr id="2" name="Title 1"/>
@@ -3329,8 +3427,8 @@
         </p:nvSpPr>
         <p:spPr>
           <a:xfrm>
-            <a:off x="853418" y="2057400"/>
-            <a:ext cx="6095847" cy="1554480"/>
+            <a:off x="822960" y="2606040"/>
+            <a:ext cx="5608179" cy="1188720"/>
           </a:xfrm>
         </p:spPr>
         <p:txBody>
@@ -3347,7 +3445,7 @@
             <a:r>
               <a:rPr sz="4000" b="1" i="0">
                 <a:solidFill>
-                  <a:srgbClr val="5B2315"/>
+                  <a:srgbClr val="26231F"/>
                 </a:solidFill>
               </a:rPr>
               <a:t>첫 번째 생일</a:t>
@@ -3357,14 +3455,14 @@
       </p:sp>
       <p:sp>
         <p:nvSpPr>
-          <p:cNvPr id="4" name="한 줄 문구"/>
+          <p:cNvPr id="6" name="한 줄 문구"/>
           <p:cNvSpPr txBox="1"/>
           <p:nvPr/>
         </p:nvSpPr>
         <p:spPr>
           <a:xfrm>
-            <a:off x="853418" y="3749039"/>
-            <a:ext cx="6095847" cy="822960"/>
+            <a:off x="822960" y="3886200"/>
+            <a:ext cx="5608179" cy="822960"/>
           </a:xfrm>
           <a:prstGeom prst="rect">
             <a:avLst/>
@@ -3383,9 +3481,9 @@
               </a:lnSpc>
             </a:pPr>
             <a:r>
-              <a:rPr sz="1700" b="0" i="1">
-                <a:solidFill>
-                  <a:srgbClr val="5B2315"/>
+              <a:rPr sz="1700" b="0" i="0">
+                <a:solidFill>
+                  <a:srgbClr val="26231F"/>
                 </a:solidFill>
               </a:rPr>
               <a:t>산후조리원에서 집으로 오던 날</a:t>
@@ -3395,14 +3493,14 @@
       </p:sp>
       <p:sp>
         <p:nvSpPr>
-          <p:cNvPr id="5" name="안내 문구"/>
+          <p:cNvPr id="7" name="안내 문구"/>
           <p:cNvSpPr txBox="1"/>
           <p:nvPr/>
         </p:nvSpPr>
         <p:spPr>
           <a:xfrm>
-            <a:off x="853418" y="4617720"/>
-            <a:ext cx="6095847" cy="914400"/>
+            <a:off x="822960" y="4754880"/>
+            <a:ext cx="5608179" cy="914400"/>
           </a:xfrm>
           <a:prstGeom prst="rect">
             <a:avLst/>
@@ -3423,10 +3521,10 @@
             <a:r>
               <a:rPr sz="1400" b="0" i="0">
                 <a:solidFill>
-                  <a:srgbClr val="666666"/>
+                  <a:srgbClr val="26231F"/>
                 </a:solidFill>
               </a:rPr>
-              <a:t>아기 이름 · 2027. 00. 00</a:t>
+              <a:t>아기 이름 · 날짜 입력</a:t>
             </a:r>
           </a:p>
           <a:p>
@@ -3438,7 +3536,7 @@
             <a:r>
               <a:rPr sz="1400" b="0" i="0">
                 <a:solidFill>
-                  <a:srgbClr val="666666"/>
+                  <a:srgbClr val="26231F"/>
                 </a:solidFill>
               </a:rPr>
               <a:t>장소를 입력하세요</a:t>
@@ -3460,7 +3558,7 @@
     <p:bg>
       <p:bgPr>
         <a:solidFill>
-          <a:srgbClr val="FBF1EE"/>
+          <a:srgbClr val="FBEFEC"/>
         </a:solidFill>
         <a:effectLst/>
       </p:bgPr>
@@ -3479,18 +3577,82 @@
           <p:nvPr/>
         </p:nvSpPr>
         <p:spPr>
-          <a:xfrm rot="10800000">
-            <a:off x="10637215" y="0"/>
-            <a:ext cx="914400" cy="1554480"/>
-          </a:xfrm>
-          <a:prstGeom prst="round2SameRect">
-            <a:avLst>
-              <a:gd name="adj1" fmla="val 50000"/>
-              <a:gd name="adj2" fmla="val 0"/>
-            </a:avLst>
+          <a:xfrm>
+            <a:off x="640080" y="6400800"/>
+            <a:ext cx="10911535" cy="10972"/>
+          </a:xfrm>
+          <a:prstGeom prst="rect">
+            <a:avLst/>
           </a:prstGeom>
           <a:solidFill>
-            <a:srgbClr val="F5D4CC"/>
+            <a:srgbClr val="26231F"/>
+          </a:solidFill>
+          <a:ln>
+            <a:noFill/>
+          </a:ln>
+        </p:spPr>
+        <p:txBody>
+          <a:bodyPr rtlCol="0" anchor="ctr"/>
+          <a:lstStyle/>
+          <a:p>
+            <a:pPr algn="ctr"/>
+          </a:p>
+        </p:txBody>
+      </p:sp>
+      <p:sp>
+        <p:nvSpPr>
+          <p:cNvPr id="4" name="하단 라벨"/>
+          <p:cNvSpPr txBox="1"/>
+          <p:nvPr/>
+        </p:nvSpPr>
+        <p:spPr>
+          <a:xfrm>
+            <a:off x="640080" y="6437376"/>
+            <a:ext cx="5486400" cy="274320"/>
+          </a:xfrm>
+          <a:prstGeom prst="rect">
+            <a:avLst/>
+          </a:prstGeom>
+          <a:noFill/>
+        </p:spPr>
+        <p:txBody>
+          <a:bodyPr wrap="square" lIns="54864" rIns="54864" tIns="27432" bIns="27432" anchor="ctr">
+            <a:noAutofit/>
+          </a:bodyPr>
+          <a:lstStyle/>
+          <a:p>
+            <a:pPr algn="l">
+              <a:lnSpc>
+                <a:spcPct val="115000"/>
+              </a:lnSpc>
+            </a:pPr>
+            <a:r>
+              <a:rPr sz="900" b="1" i="0" spc="250">
+                <a:solidFill>
+                  <a:srgbClr val="26231F"/>
+                </a:solidFill>
+              </a:rPr>
+              <a:t>FIRST BIRTHDAY</a:t>
+            </a:r>
+          </a:p>
+        </p:txBody>
+      </p:sp>
+      <p:sp>
+        <p:nvSpPr>
+          <p:cNvPr id="5" name="포인트"/>
+          <p:cNvSpPr/>
+          <p:nvPr/>
+        </p:nvSpPr>
+        <p:spPr>
+          <a:xfrm>
+            <a:off x="11213287" y="6473952"/>
+            <a:ext cx="219456" cy="219456"/>
+          </a:xfrm>
+          <a:prstGeom prst="ellipse">
+            <a:avLst/>
+          </a:prstGeom>
+          <a:solidFill>
+            <a:srgbClr val="D88C79"/>
           </a:solidFill>
           <a:ln>
             <a:noFill/>
@@ -3516,8 +3678,8 @@
         </p:nvSpPr>
         <p:spPr>
           <a:xfrm>
-            <a:off x="640080" y="457200"/>
-            <a:ext cx="9722815" cy="868680"/>
+            <a:off x="640080" y="502920"/>
+            <a:ext cx="10911535" cy="914400"/>
           </a:xfrm>
         </p:spPr>
         <p:txBody>
@@ -3534,7 +3696,7 @@
             <a:r>
               <a:rPr sz="3000" b="1" i="0">
                 <a:solidFill>
-                  <a:srgbClr val="5B2315"/>
+                  <a:srgbClr val="26231F"/>
                 </a:solidFill>
               </a:rPr>
               <a:t>우리 아기를 소개합니다</a:t>
@@ -3544,14 +3706,14 @@
       </p:sp>
       <p:sp>
         <p:nvSpPr>
-          <p:cNvPr id="4" name="사진 자리"/>
+          <p:cNvPr id="6" name="사진 자리"/>
           <p:cNvSpPr/>
           <p:nvPr/>
         </p:nvSpPr>
         <p:spPr>
           <a:xfrm>
             <a:off x="640080" y="1600200"/>
-            <a:ext cx="3840480" cy="4617720"/>
+            <a:ext cx="3840480" cy="4389120"/>
           </a:xfrm>
           <a:prstGeom prst="roundRect">
             <a:avLst>
@@ -3559,12 +3721,10 @@
             </a:avLst>
           </a:prstGeom>
           <a:solidFill>
-            <a:srgbClr val="F5D4CC"/>
+            <a:srgbClr val="F6DCD5"/>
           </a:solidFill>
           <a:ln w="19050">
-            <a:solidFill>
-              <a:srgbClr val="AE4329"/>
-            </a:solidFill>
+            <a:noFill/>
             <a:prstDash val="dash"/>
           </a:ln>
         </p:spPr>
@@ -3582,7 +3742,7 @@
             <a:r>
               <a:rPr sz="1400" b="0" i="0">
                 <a:solidFill>
-                  <a:srgbClr val="5B2315"/>
+                  <a:srgbClr val="8E8780"/>
                 </a:solidFill>
               </a:rPr>
               <a:t>아기 사진을 넣어 주세요</a:t>
@@ -3592,7 +3752,7 @@
       </p:sp>
       <p:graphicFrame>
         <p:nvGraphicFramePr>
-          <p:cNvPr id="5" name="표"/>
+          <p:cNvPr id="7" name="표"/>
           <p:cNvGraphicFramePr>
             <a:graphicFrameLocks noGrp="1"/>
           </p:cNvGraphicFramePr>
@@ -3622,7 +3782,7 @@
                       <a:r>
                         <a:rPr sz="1500" b="1">
                           <a:solidFill>
-                            <a:srgbClr val="5B2315"/>
+                            <a:srgbClr val="492E27"/>
                           </a:solidFill>
                         </a:rPr>
                         <a:t>이름</a:t>
@@ -3632,30 +3792,30 @@
                   <a:tcPr anchor="ctr" marL="73152" marR="73152">
                     <a:lnL w="9525" cap="flat" cmpd="sng" algn="ctr">
                       <a:solidFill>
-                        <a:srgbClr val="F5D4CC"/>
+                        <a:srgbClr val="F6DCD5"/>
                       </a:solidFill>
                       <a:prstDash val="solid"/>
                     </a:lnL>
                     <a:lnR w="9525" cap="flat" cmpd="sng" algn="ctr">
                       <a:solidFill>
-                        <a:srgbClr val="F5D4CC"/>
+                        <a:srgbClr val="F6DCD5"/>
                       </a:solidFill>
                       <a:prstDash val="solid"/>
                     </a:lnR>
                     <a:lnT w="9525" cap="flat" cmpd="sng" algn="ctr">
                       <a:solidFill>
-                        <a:srgbClr val="F5D4CC"/>
+                        <a:srgbClr val="F6DCD5"/>
                       </a:solidFill>
                       <a:prstDash val="solid"/>
                     </a:lnT>
                     <a:lnB w="9525" cap="flat" cmpd="sng" algn="ctr">
                       <a:solidFill>
-                        <a:srgbClr val="F5D4CC"/>
+                        <a:srgbClr val="F6DCD5"/>
                       </a:solidFill>
                       <a:prstDash val="solid"/>
                     </a:lnB>
                     <a:solidFill>
-                      <a:srgbClr val="F5D4CC"/>
+                      <a:srgbClr val="F6DCD5"/>
                     </a:solidFill>
                   </a:tcPr>
                 </a:tc>
@@ -3668,7 +3828,7 @@
                       <a:r>
                         <a:rPr sz="1500" b="0">
                           <a:solidFill>
-                            <a:srgbClr val="2B2B2B"/>
+                            <a:srgbClr val="26231F"/>
                           </a:solidFill>
                         </a:rPr>
                         <a:t>입력하세요</a:t>
@@ -3678,30 +3838,30 @@
                   <a:tcPr anchor="ctr" marL="73152" marR="73152">
                     <a:lnL w="9525" cap="flat" cmpd="sng" algn="ctr">
                       <a:solidFill>
-                        <a:srgbClr val="F5D4CC"/>
+                        <a:srgbClr val="F6DCD5"/>
                       </a:solidFill>
                       <a:prstDash val="solid"/>
                     </a:lnL>
                     <a:lnR w="9525" cap="flat" cmpd="sng" algn="ctr">
                       <a:solidFill>
-                        <a:srgbClr val="F5D4CC"/>
+                        <a:srgbClr val="F6DCD5"/>
                       </a:solidFill>
                       <a:prstDash val="solid"/>
                     </a:lnR>
                     <a:lnT w="9525" cap="flat" cmpd="sng" algn="ctr">
                       <a:solidFill>
-                        <a:srgbClr val="F5D4CC"/>
+                        <a:srgbClr val="F6DCD5"/>
                       </a:solidFill>
                       <a:prstDash val="solid"/>
                     </a:lnT>
                     <a:lnB w="9525" cap="flat" cmpd="sng" algn="ctr">
                       <a:solidFill>
-                        <a:srgbClr val="F5D4CC"/>
+                        <a:srgbClr val="F6DCD5"/>
                       </a:solidFill>
                       <a:prstDash val="solid"/>
                     </a:lnB>
                     <a:solidFill>
-                      <a:srgbClr val="FBF1EE"/>
+                      <a:srgbClr val="FBEFEC"/>
                     </a:solidFill>
                   </a:tcPr>
                 </a:tc>
@@ -3716,7 +3876,7 @@
                       <a:r>
                         <a:rPr sz="1500" b="1">
                           <a:solidFill>
-                            <a:srgbClr val="5B2315"/>
+                            <a:srgbClr val="492E27"/>
                           </a:solidFill>
                         </a:rPr>
                         <a:t>생일</a:t>
@@ -3726,30 +3886,30 @@
                   <a:tcPr anchor="ctr" marL="73152" marR="73152">
                     <a:lnL w="9525" cap="flat" cmpd="sng" algn="ctr">
                       <a:solidFill>
-                        <a:srgbClr val="F5D4CC"/>
+                        <a:srgbClr val="F6DCD5"/>
                       </a:solidFill>
                       <a:prstDash val="solid"/>
                     </a:lnL>
                     <a:lnR w="9525" cap="flat" cmpd="sng" algn="ctr">
                       <a:solidFill>
-                        <a:srgbClr val="F5D4CC"/>
+                        <a:srgbClr val="F6DCD5"/>
                       </a:solidFill>
                       <a:prstDash val="solid"/>
                     </a:lnR>
                     <a:lnT w="9525" cap="flat" cmpd="sng" algn="ctr">
                       <a:solidFill>
-                        <a:srgbClr val="F5D4CC"/>
+                        <a:srgbClr val="F6DCD5"/>
                       </a:solidFill>
                       <a:prstDash val="solid"/>
                     </a:lnT>
                     <a:lnB w="9525" cap="flat" cmpd="sng" algn="ctr">
                       <a:solidFill>
-                        <a:srgbClr val="F5D4CC"/>
+                        <a:srgbClr val="F6DCD5"/>
                       </a:solidFill>
                       <a:prstDash val="solid"/>
                     </a:lnB>
                     <a:solidFill>
-                      <a:srgbClr val="F5D4CC"/>
+                      <a:srgbClr val="F6DCD5"/>
                     </a:solidFill>
                   </a:tcPr>
                 </a:tc>
@@ -3762,7 +3922,7 @@
                       <a:r>
                         <a:rPr sz="1500" b="0">
                           <a:solidFill>
-                            <a:srgbClr val="2B2B2B"/>
+                            <a:srgbClr val="26231F"/>
                           </a:solidFill>
                         </a:rPr>
                         <a:t>입력하세요</a:t>
@@ -3772,25 +3932,25 @@
                   <a:tcPr anchor="ctr" marL="73152" marR="73152">
                     <a:lnL w="9525" cap="flat" cmpd="sng" algn="ctr">
                       <a:solidFill>
-                        <a:srgbClr val="F5D4CC"/>
+                        <a:srgbClr val="F6DCD5"/>
                       </a:solidFill>
                       <a:prstDash val="solid"/>
                     </a:lnL>
                     <a:lnR w="9525" cap="flat" cmpd="sng" algn="ctr">
                       <a:solidFill>
-                        <a:srgbClr val="F5D4CC"/>
+                        <a:srgbClr val="F6DCD5"/>
                       </a:solidFill>
                       <a:prstDash val="solid"/>
                     </a:lnR>
                     <a:lnT w="9525" cap="flat" cmpd="sng" algn="ctr">
                       <a:solidFill>
-                        <a:srgbClr val="F5D4CC"/>
+                        <a:srgbClr val="F6DCD5"/>
                       </a:solidFill>
                       <a:prstDash val="solid"/>
                     </a:lnT>
                     <a:lnB w="9525" cap="flat" cmpd="sng" algn="ctr">
                       <a:solidFill>
-                        <a:srgbClr val="F5D4CC"/>
+                        <a:srgbClr val="F6DCD5"/>
                       </a:solidFill>
                       <a:prstDash val="solid"/>
                     </a:lnB>
@@ -3810,7 +3970,7 @@
                       <a:r>
                         <a:rPr sz="1500" b="1">
                           <a:solidFill>
-                            <a:srgbClr val="5B2315"/>
+                            <a:srgbClr val="492E27"/>
                           </a:solidFill>
                         </a:rPr>
                         <a:t>키 · 몸무게</a:t>
@@ -3820,30 +3980,30 @@
                   <a:tcPr anchor="ctr" marL="73152" marR="73152">
                     <a:lnL w="9525" cap="flat" cmpd="sng" algn="ctr">
                       <a:solidFill>
-                        <a:srgbClr val="F5D4CC"/>
+                        <a:srgbClr val="F6DCD5"/>
                       </a:solidFill>
                       <a:prstDash val="solid"/>
                     </a:lnL>
                     <a:lnR w="9525" cap="flat" cmpd="sng" algn="ctr">
                       <a:solidFill>
-                        <a:srgbClr val="F5D4CC"/>
+                        <a:srgbClr val="F6DCD5"/>
                       </a:solidFill>
                       <a:prstDash val="solid"/>
                     </a:lnR>
                     <a:lnT w="9525" cap="flat" cmpd="sng" algn="ctr">
                       <a:solidFill>
-                        <a:srgbClr val="F5D4CC"/>
+                        <a:srgbClr val="F6DCD5"/>
                       </a:solidFill>
                       <a:prstDash val="solid"/>
                     </a:lnT>
                     <a:lnB w="9525" cap="flat" cmpd="sng" algn="ctr">
                       <a:solidFill>
-                        <a:srgbClr val="F5D4CC"/>
+                        <a:srgbClr val="F6DCD5"/>
                       </a:solidFill>
                       <a:prstDash val="solid"/>
                     </a:lnB>
                     <a:solidFill>
-                      <a:srgbClr val="F5D4CC"/>
+                      <a:srgbClr val="F6DCD5"/>
                     </a:solidFill>
                   </a:tcPr>
                 </a:tc>
@@ -3856,7 +4016,7 @@
                       <a:r>
                         <a:rPr sz="1500" b="0">
                           <a:solidFill>
-                            <a:srgbClr val="2B2B2B"/>
+                            <a:srgbClr val="26231F"/>
                           </a:solidFill>
                         </a:rPr>
                         <a:t>입력하세요</a:t>
@@ -3866,30 +4026,30 @@
                   <a:tcPr anchor="ctr" marL="73152" marR="73152">
                     <a:lnL w="9525" cap="flat" cmpd="sng" algn="ctr">
                       <a:solidFill>
-                        <a:srgbClr val="F5D4CC"/>
+                        <a:srgbClr val="F6DCD5"/>
                       </a:solidFill>
                       <a:prstDash val="solid"/>
                     </a:lnL>
                     <a:lnR w="9525" cap="flat" cmpd="sng" algn="ctr">
                       <a:solidFill>
-                        <a:srgbClr val="F5D4CC"/>
+                        <a:srgbClr val="F6DCD5"/>
                       </a:solidFill>
                       <a:prstDash val="solid"/>
                     </a:lnR>
                     <a:lnT w="9525" cap="flat" cmpd="sng" algn="ctr">
                       <a:solidFill>
-                        <a:srgbClr val="F5D4CC"/>
+                        <a:srgbClr val="F6DCD5"/>
                       </a:solidFill>
                       <a:prstDash val="solid"/>
                     </a:lnT>
                     <a:lnB w="9525" cap="flat" cmpd="sng" algn="ctr">
                       <a:solidFill>
-                        <a:srgbClr val="F5D4CC"/>
+                        <a:srgbClr val="F6DCD5"/>
                       </a:solidFill>
                       <a:prstDash val="solid"/>
                     </a:lnB>
                     <a:solidFill>
-                      <a:srgbClr val="FBF1EE"/>
+                      <a:srgbClr val="FBEFEC"/>
                     </a:solidFill>
                   </a:tcPr>
                 </a:tc>
@@ -3904,7 +4064,7 @@
                       <a:r>
                         <a:rPr sz="1500" b="1">
                           <a:solidFill>
-                            <a:srgbClr val="5B2315"/>
+                            <a:srgbClr val="492E27"/>
                           </a:solidFill>
                         </a:rPr>
                         <a:t>좋아하는 것</a:t>
@@ -3914,30 +4074,30 @@
                   <a:tcPr anchor="ctr" marL="73152" marR="73152">
                     <a:lnL w="9525" cap="flat" cmpd="sng" algn="ctr">
                       <a:solidFill>
-                        <a:srgbClr val="F5D4CC"/>
+                        <a:srgbClr val="F6DCD5"/>
                       </a:solidFill>
                       <a:prstDash val="solid"/>
                     </a:lnL>
                     <a:lnR w="9525" cap="flat" cmpd="sng" algn="ctr">
                       <a:solidFill>
-                        <a:srgbClr val="F5D4CC"/>
+                        <a:srgbClr val="F6DCD5"/>
                       </a:solidFill>
                       <a:prstDash val="solid"/>
                     </a:lnR>
                     <a:lnT w="9525" cap="flat" cmpd="sng" algn="ctr">
                       <a:solidFill>
-                        <a:srgbClr val="F5D4CC"/>
+                        <a:srgbClr val="F6DCD5"/>
                       </a:solidFill>
                       <a:prstDash val="solid"/>
                     </a:lnT>
                     <a:lnB w="9525" cap="flat" cmpd="sng" algn="ctr">
                       <a:solidFill>
-                        <a:srgbClr val="F5D4CC"/>
+                        <a:srgbClr val="F6DCD5"/>
                       </a:solidFill>
                       <a:prstDash val="solid"/>
                     </a:lnB>
                     <a:solidFill>
-                      <a:srgbClr val="F5D4CC"/>
+                      <a:srgbClr val="F6DCD5"/>
                     </a:solidFill>
                   </a:tcPr>
                 </a:tc>
@@ -3950,7 +4110,7 @@
                       <a:r>
                         <a:rPr sz="1500" b="0">
                           <a:solidFill>
-                            <a:srgbClr val="2B2B2B"/>
+                            <a:srgbClr val="26231F"/>
                           </a:solidFill>
                         </a:rPr>
                         <a:t>입력하세요</a:t>
@@ -3960,25 +4120,25 @@
                   <a:tcPr anchor="ctr" marL="73152" marR="73152">
                     <a:lnL w="9525" cap="flat" cmpd="sng" algn="ctr">
                       <a:solidFill>
-                        <a:srgbClr val="F5D4CC"/>
+                        <a:srgbClr val="F6DCD5"/>
                       </a:solidFill>
                       <a:prstDash val="solid"/>
                     </a:lnL>
                     <a:lnR w="9525" cap="flat" cmpd="sng" algn="ctr">
                       <a:solidFill>
-                        <a:srgbClr val="F5D4CC"/>
+                        <a:srgbClr val="F6DCD5"/>
                       </a:solidFill>
                       <a:prstDash val="solid"/>
                     </a:lnR>
                     <a:lnT w="9525" cap="flat" cmpd="sng" algn="ctr">
                       <a:solidFill>
-                        <a:srgbClr val="F5D4CC"/>
+                        <a:srgbClr val="F6DCD5"/>
                       </a:solidFill>
                       <a:prstDash val="solid"/>
                     </a:lnT>
                     <a:lnB w="9525" cap="flat" cmpd="sng" algn="ctr">
                       <a:solidFill>
-                        <a:srgbClr val="F5D4CC"/>
+                        <a:srgbClr val="F6DCD5"/>
                       </a:solidFill>
                       <a:prstDash val="solid"/>
                     </a:lnB>
@@ -3998,7 +4158,7 @@
                       <a:r>
                         <a:rPr sz="1500" b="1">
                           <a:solidFill>
-                            <a:srgbClr val="5B2315"/>
+                            <a:srgbClr val="492E27"/>
                           </a:solidFill>
                         </a:rPr>
                         <a:t>별명</a:t>
@@ -4008,30 +4168,30 @@
                   <a:tcPr anchor="ctr" marL="73152" marR="73152">
                     <a:lnL w="9525" cap="flat" cmpd="sng" algn="ctr">
                       <a:solidFill>
-                        <a:srgbClr val="F5D4CC"/>
+                        <a:srgbClr val="F6DCD5"/>
                       </a:solidFill>
                       <a:prstDash val="solid"/>
                     </a:lnL>
                     <a:lnR w="9525" cap="flat" cmpd="sng" algn="ctr">
                       <a:solidFill>
-                        <a:srgbClr val="F5D4CC"/>
+                        <a:srgbClr val="F6DCD5"/>
                       </a:solidFill>
                       <a:prstDash val="solid"/>
                     </a:lnR>
                     <a:lnT w="9525" cap="flat" cmpd="sng" algn="ctr">
                       <a:solidFill>
-                        <a:srgbClr val="F5D4CC"/>
+                        <a:srgbClr val="F6DCD5"/>
                       </a:solidFill>
                       <a:prstDash val="solid"/>
                     </a:lnT>
                     <a:lnB w="9525" cap="flat" cmpd="sng" algn="ctr">
                       <a:solidFill>
-                        <a:srgbClr val="F5D4CC"/>
+                        <a:srgbClr val="F6DCD5"/>
                       </a:solidFill>
                       <a:prstDash val="solid"/>
                     </a:lnB>
                     <a:solidFill>
-                      <a:srgbClr val="F5D4CC"/>
+                      <a:srgbClr val="F6DCD5"/>
                     </a:solidFill>
                   </a:tcPr>
                 </a:tc>
@@ -4044,7 +4204,7 @@
                       <a:r>
                         <a:rPr sz="1500" b="0">
                           <a:solidFill>
-                            <a:srgbClr val="2B2B2B"/>
+                            <a:srgbClr val="26231F"/>
                           </a:solidFill>
                         </a:rPr>
                         <a:t>입력하세요</a:t>
@@ -4054,30 +4214,30 @@
                   <a:tcPr anchor="ctr" marL="73152" marR="73152">
                     <a:lnL w="9525" cap="flat" cmpd="sng" algn="ctr">
                       <a:solidFill>
-                        <a:srgbClr val="F5D4CC"/>
+                        <a:srgbClr val="F6DCD5"/>
                       </a:solidFill>
                       <a:prstDash val="solid"/>
                     </a:lnL>
                     <a:lnR w="9525" cap="flat" cmpd="sng" algn="ctr">
                       <a:solidFill>
-                        <a:srgbClr val="F5D4CC"/>
+                        <a:srgbClr val="F6DCD5"/>
                       </a:solidFill>
                       <a:prstDash val="solid"/>
                     </a:lnR>
                     <a:lnT w="9525" cap="flat" cmpd="sng" algn="ctr">
                       <a:solidFill>
-                        <a:srgbClr val="F5D4CC"/>
+                        <a:srgbClr val="F6DCD5"/>
                       </a:solidFill>
                       <a:prstDash val="solid"/>
                     </a:lnT>
                     <a:lnB w="9525" cap="flat" cmpd="sng" algn="ctr">
                       <a:solidFill>
-                        <a:srgbClr val="F5D4CC"/>
+                        <a:srgbClr val="F6DCD5"/>
                       </a:solidFill>
                       <a:prstDash val="solid"/>
                     </a:lnB>
                     <a:solidFill>
-                      <a:srgbClr val="FBF1EE"/>
+                      <a:srgbClr val="FBEFEC"/>
                     </a:solidFill>
                   </a:tcPr>
                 </a:tc>
@@ -4092,7 +4252,7 @@
                       <a:r>
                         <a:rPr sz="1500" b="1">
                           <a:solidFill>
-                            <a:srgbClr val="5B2315"/>
+                            <a:srgbClr val="492E27"/>
                           </a:solidFill>
                         </a:rPr>
                         <a:t>부모의 마음</a:t>
@@ -4102,30 +4262,30 @@
                   <a:tcPr anchor="ctr" marL="73152" marR="73152">
                     <a:lnL w="9525" cap="flat" cmpd="sng" algn="ctr">
                       <a:solidFill>
-                        <a:srgbClr val="F5D4CC"/>
+                        <a:srgbClr val="F6DCD5"/>
                       </a:solidFill>
                       <a:prstDash val="solid"/>
                     </a:lnL>
                     <a:lnR w="9525" cap="flat" cmpd="sng" algn="ctr">
                       <a:solidFill>
-                        <a:srgbClr val="F5D4CC"/>
+                        <a:srgbClr val="F6DCD5"/>
                       </a:solidFill>
                       <a:prstDash val="solid"/>
                     </a:lnR>
                     <a:lnT w="9525" cap="flat" cmpd="sng" algn="ctr">
                       <a:solidFill>
-                        <a:srgbClr val="F5D4CC"/>
+                        <a:srgbClr val="F6DCD5"/>
                       </a:solidFill>
                       <a:prstDash val="solid"/>
                     </a:lnT>
                     <a:lnB w="9525" cap="flat" cmpd="sng" algn="ctr">
                       <a:solidFill>
-                        <a:srgbClr val="F5D4CC"/>
+                        <a:srgbClr val="F6DCD5"/>
                       </a:solidFill>
                       <a:prstDash val="solid"/>
                     </a:lnB>
                     <a:solidFill>
-                      <a:srgbClr val="F5D4CC"/>
+                      <a:srgbClr val="F6DCD5"/>
                     </a:solidFill>
                   </a:tcPr>
                 </a:tc>
@@ -4138,7 +4298,7 @@
                       <a:r>
                         <a:rPr sz="1500" b="0">
                           <a:solidFill>
-                            <a:srgbClr val="2B2B2B"/>
+                            <a:srgbClr val="26231F"/>
                           </a:solidFill>
                         </a:rPr>
                         <a:t>입력하세요</a:t>
@@ -4148,25 +4308,25 @@
                   <a:tcPr anchor="ctr" marL="73152" marR="73152">
                     <a:lnL w="9525" cap="flat" cmpd="sng" algn="ctr">
                       <a:solidFill>
-                        <a:srgbClr val="F5D4CC"/>
+                        <a:srgbClr val="F6DCD5"/>
                       </a:solidFill>
                       <a:prstDash val="solid"/>
                     </a:lnL>
                     <a:lnR w="9525" cap="flat" cmpd="sng" algn="ctr">
                       <a:solidFill>
-                        <a:srgbClr val="F5D4CC"/>
+                        <a:srgbClr val="F6DCD5"/>
                       </a:solidFill>
                       <a:prstDash val="solid"/>
                     </a:lnR>
                     <a:lnT w="9525" cap="flat" cmpd="sng" algn="ctr">
                       <a:solidFill>
-                        <a:srgbClr val="F5D4CC"/>
+                        <a:srgbClr val="F6DCD5"/>
                       </a:solidFill>
                       <a:prstDash val="solid"/>
                     </a:lnT>
                     <a:lnB w="9525" cap="flat" cmpd="sng" algn="ctr">
                       <a:solidFill>
-                        <a:srgbClr val="F5D4CC"/>
+                        <a:srgbClr val="F6DCD5"/>
                       </a:solidFill>
                       <a:prstDash val="solid"/>
                     </a:lnB>
@@ -4194,7 +4354,7 @@
     <p:bg>
       <p:bgPr>
         <a:solidFill>
-          <a:srgbClr val="FBF1EE"/>
+          <a:srgbClr val="FBEFEC"/>
         </a:solidFill>
         <a:effectLst/>
       </p:bgPr>
@@ -4213,18 +4373,82 @@
           <p:nvPr/>
         </p:nvSpPr>
         <p:spPr>
-          <a:xfrm rot="10800000">
-            <a:off x="10637215" y="0"/>
-            <a:ext cx="914400" cy="1554480"/>
-          </a:xfrm>
-          <a:prstGeom prst="round2SameRect">
-            <a:avLst>
-              <a:gd name="adj1" fmla="val 50000"/>
-              <a:gd name="adj2" fmla="val 0"/>
-            </a:avLst>
+          <a:xfrm>
+            <a:off x="640080" y="6400800"/>
+            <a:ext cx="10911535" cy="10972"/>
+          </a:xfrm>
+          <a:prstGeom prst="rect">
+            <a:avLst/>
           </a:prstGeom>
           <a:solidFill>
-            <a:srgbClr val="F5D4CC"/>
+            <a:srgbClr val="26231F"/>
+          </a:solidFill>
+          <a:ln>
+            <a:noFill/>
+          </a:ln>
+        </p:spPr>
+        <p:txBody>
+          <a:bodyPr rtlCol="0" anchor="ctr"/>
+          <a:lstStyle/>
+          <a:p>
+            <a:pPr algn="ctr"/>
+          </a:p>
+        </p:txBody>
+      </p:sp>
+      <p:sp>
+        <p:nvSpPr>
+          <p:cNvPr id="4" name="하단 라벨"/>
+          <p:cNvSpPr txBox="1"/>
+          <p:nvPr/>
+        </p:nvSpPr>
+        <p:spPr>
+          <a:xfrm>
+            <a:off x="640080" y="6437376"/>
+            <a:ext cx="5486400" cy="274320"/>
+          </a:xfrm>
+          <a:prstGeom prst="rect">
+            <a:avLst/>
+          </a:prstGeom>
+          <a:noFill/>
+        </p:spPr>
+        <p:txBody>
+          <a:bodyPr wrap="square" lIns="54864" rIns="54864" tIns="27432" bIns="27432" anchor="ctr">
+            <a:noAutofit/>
+          </a:bodyPr>
+          <a:lstStyle/>
+          <a:p>
+            <a:pPr algn="l">
+              <a:lnSpc>
+                <a:spcPct val="115000"/>
+              </a:lnSpc>
+            </a:pPr>
+            <a:r>
+              <a:rPr sz="900" b="1" i="0" spc="250">
+                <a:solidFill>
+                  <a:srgbClr val="26231F"/>
+                </a:solidFill>
+              </a:rPr>
+              <a:t>FIRST BIRTHDAY</a:t>
+            </a:r>
+          </a:p>
+        </p:txBody>
+      </p:sp>
+      <p:sp>
+        <p:nvSpPr>
+          <p:cNvPr id="5" name="포인트"/>
+          <p:cNvSpPr/>
+          <p:nvPr/>
+        </p:nvSpPr>
+        <p:spPr>
+          <a:xfrm>
+            <a:off x="11213287" y="6473952"/>
+            <a:ext cx="219456" cy="219456"/>
+          </a:xfrm>
+          <a:prstGeom prst="ellipse">
+            <a:avLst/>
+          </a:prstGeom>
+          <a:solidFill>
+            <a:srgbClr val="D88C79"/>
           </a:solidFill>
           <a:ln>
             <a:noFill/>
@@ -4250,8 +4474,8 @@
         </p:nvSpPr>
         <p:spPr>
           <a:xfrm>
-            <a:off x="640080" y="457200"/>
-            <a:ext cx="9722815" cy="868680"/>
+            <a:off x="640080" y="502920"/>
+            <a:ext cx="10911535" cy="914400"/>
           </a:xfrm>
         </p:spPr>
         <p:txBody>
@@ -4268,7 +4492,7 @@
             <a:r>
               <a:rPr sz="3000" b="1" i="0">
                 <a:solidFill>
-                  <a:srgbClr val="5B2315"/>
+                  <a:srgbClr val="26231F"/>
                 </a:solidFill>
               </a:rPr>
               <a:t>태어난 날 이야기</a:t>
@@ -4278,7 +4502,7 @@
       </p:sp>
       <p:sp>
         <p:nvSpPr>
-          <p:cNvPr id="4" name="타임라인 선"/>
+          <p:cNvPr id="6" name="타임라인 선"/>
           <p:cNvSpPr/>
           <p:nvPr/>
         </p:nvSpPr>
@@ -4291,7 +4515,7 @@
             <a:avLst/>
           </a:prstGeom>
           <a:solidFill>
-            <a:srgbClr val="F5D4CC"/>
+            <a:srgbClr val="F6DCD5"/>
           </a:solidFill>
           <a:ln>
             <a:noFill/>
@@ -4307,7 +4531,7 @@
       </p:sp>
       <p:sp>
         <p:nvSpPr>
-          <p:cNvPr id="5" name="때 1"/>
+          <p:cNvPr id="7" name="때 1"/>
           <p:cNvSpPr/>
           <p:nvPr/>
         </p:nvSpPr>
@@ -4320,7 +4544,7 @@
             <a:avLst/>
           </a:prstGeom>
           <a:solidFill>
-            <a:srgbClr val="AE4329"/>
+            <a:srgbClr val="D88C79"/>
           </a:solidFill>
           <a:ln w="38100">
             <a:solidFill>
@@ -4338,7 +4562,7 @@
       </p:sp>
       <p:sp>
         <p:nvSpPr>
-          <p:cNvPr id="6" name="TextBox 5"/>
+          <p:cNvPr id="8" name="TextBox 7"/>
           <p:cNvSpPr txBox="1"/>
           <p:nvPr/>
         </p:nvSpPr>
@@ -4366,7 +4590,7 @@
             <a:r>
               <a:rPr sz="1600" b="1" i="0">
                 <a:solidFill>
-                  <a:srgbClr val="AE4329"/>
+                  <a:srgbClr val="D88C79"/>
                 </a:solidFill>
               </a:rPr>
               <a:t>임신</a:t>
@@ -4376,7 +4600,7 @@
       </p:sp>
       <p:sp>
         <p:nvSpPr>
-          <p:cNvPr id="7" name="TextBox 6"/>
+          <p:cNvPr id="9" name="TextBox 8"/>
           <p:cNvSpPr txBox="1"/>
           <p:nvPr/>
         </p:nvSpPr>
@@ -4404,7 +4628,7 @@
             <a:r>
               <a:rPr sz="1800" b="1" i="0">
                 <a:solidFill>
-                  <a:srgbClr val="5B2315"/>
+                  <a:srgbClr val="492E27"/>
                 </a:solidFill>
               </a:rPr>
               <a:t>소식을 들은 날</a:t>
@@ -4414,7 +4638,7 @@
       </p:sp>
       <p:sp>
         <p:nvSpPr>
-          <p:cNvPr id="8" name="TextBox 7"/>
+          <p:cNvPr id="10" name="TextBox 9"/>
           <p:cNvSpPr txBox="1"/>
           <p:nvPr/>
         </p:nvSpPr>
@@ -4442,7 +4666,7 @@
             <a:r>
               <a:rPr sz="1500" b="0" i="0">
                 <a:solidFill>
-                  <a:srgbClr val="2B2B2B"/>
+                  <a:srgbClr val="26231F"/>
                 </a:solidFill>
               </a:rPr>
               <a:t>기억을 적어 주세요</a:t>
@@ -4452,7 +4676,7 @@
       </p:sp>
       <p:sp>
         <p:nvSpPr>
-          <p:cNvPr id="9" name="때 2"/>
+          <p:cNvPr id="11" name="때 2"/>
           <p:cNvSpPr/>
           <p:nvPr/>
         </p:nvSpPr>
@@ -4465,7 +4689,7 @@
             <a:avLst/>
           </a:prstGeom>
           <a:solidFill>
-            <a:srgbClr val="AE4329"/>
+            <a:srgbClr val="D88C79"/>
           </a:solidFill>
           <a:ln w="38100">
             <a:solidFill>
@@ -4483,7 +4707,7 @@
       </p:sp>
       <p:sp>
         <p:nvSpPr>
-          <p:cNvPr id="10" name="TextBox 9"/>
+          <p:cNvPr id="12" name="TextBox 11"/>
           <p:cNvSpPr txBox="1"/>
           <p:nvPr/>
         </p:nvSpPr>
@@ -4511,7 +4735,7 @@
             <a:r>
               <a:rPr sz="1600" b="1" i="0">
                 <a:solidFill>
-                  <a:srgbClr val="AE4329"/>
+                  <a:srgbClr val="D88C79"/>
                 </a:solidFill>
               </a:rPr>
               <a:t>출산</a:t>
@@ -4521,7 +4745,7 @@
       </p:sp>
       <p:sp>
         <p:nvSpPr>
-          <p:cNvPr id="11" name="TextBox 10"/>
+          <p:cNvPr id="13" name="TextBox 12"/>
           <p:cNvSpPr txBox="1"/>
           <p:nvPr/>
         </p:nvSpPr>
@@ -4549,7 +4773,7 @@
             <a:r>
               <a:rPr sz="1800" b="1" i="0">
                 <a:solidFill>
-                  <a:srgbClr val="5B2315"/>
+                  <a:srgbClr val="492E27"/>
                 </a:solidFill>
               </a:rPr>
               <a:t>태어난 날</a:t>
@@ -4559,7 +4783,7 @@
       </p:sp>
       <p:sp>
         <p:nvSpPr>
-          <p:cNvPr id="12" name="TextBox 11"/>
+          <p:cNvPr id="14" name="TextBox 13"/>
           <p:cNvSpPr txBox="1"/>
           <p:nvPr/>
         </p:nvSpPr>
@@ -4587,7 +4811,7 @@
             <a:r>
               <a:rPr sz="1500" b="0" i="0">
                 <a:solidFill>
-                  <a:srgbClr val="2B2B2B"/>
+                  <a:srgbClr val="26231F"/>
                 </a:solidFill>
               </a:rPr>
               <a:t>기억을 적어 주세요</a:t>
@@ -4597,7 +4821,7 @@
       </p:sp>
       <p:sp>
         <p:nvSpPr>
-          <p:cNvPr id="13" name="때 3"/>
+          <p:cNvPr id="15" name="때 3"/>
           <p:cNvSpPr/>
           <p:nvPr/>
         </p:nvSpPr>
@@ -4610,7 +4834,7 @@
             <a:avLst/>
           </a:prstGeom>
           <a:solidFill>
-            <a:srgbClr val="AE4329"/>
+            <a:srgbClr val="D88C79"/>
           </a:solidFill>
           <a:ln w="38100">
             <a:solidFill>
@@ -4628,7 +4852,7 @@
       </p:sp>
       <p:sp>
         <p:nvSpPr>
-          <p:cNvPr id="14" name="TextBox 13"/>
+          <p:cNvPr id="16" name="TextBox 15"/>
           <p:cNvSpPr txBox="1"/>
           <p:nvPr/>
         </p:nvSpPr>
@@ -4656,7 +4880,7 @@
             <a:r>
               <a:rPr sz="1600" b="1" i="0">
                 <a:solidFill>
-                  <a:srgbClr val="AE4329"/>
+                  <a:srgbClr val="D88C79"/>
                 </a:solidFill>
               </a:rPr>
               <a:t>첫 만남</a:t>
@@ -4666,7 +4890,7 @@
       </p:sp>
       <p:sp>
         <p:nvSpPr>
-          <p:cNvPr id="15" name="TextBox 14"/>
+          <p:cNvPr id="17" name="TextBox 16"/>
           <p:cNvSpPr txBox="1"/>
           <p:nvPr/>
         </p:nvSpPr>
@@ -4694,7 +4918,7 @@
             <a:r>
               <a:rPr sz="1800" b="1" i="0">
                 <a:solidFill>
-                  <a:srgbClr val="5B2315"/>
+                  <a:srgbClr val="492E27"/>
                 </a:solidFill>
               </a:rPr>
               <a:t>품에 안은 순간</a:t>
@@ -4704,7 +4928,7 @@
       </p:sp>
       <p:sp>
         <p:nvSpPr>
-          <p:cNvPr id="16" name="TextBox 15"/>
+          <p:cNvPr id="18" name="TextBox 17"/>
           <p:cNvSpPr txBox="1"/>
           <p:nvPr/>
         </p:nvSpPr>
@@ -4732,7 +4956,7 @@
             <a:r>
               <a:rPr sz="1500" b="0" i="0">
                 <a:solidFill>
-                  <a:srgbClr val="2B2B2B"/>
+                  <a:srgbClr val="26231F"/>
                 </a:solidFill>
               </a:rPr>
               <a:t>기억을 적어 주세요</a:t>
@@ -4742,7 +4966,7 @@
       </p:sp>
       <p:sp>
         <p:nvSpPr>
-          <p:cNvPr id="17" name="때 4"/>
+          <p:cNvPr id="19" name="때 4"/>
           <p:cNvSpPr/>
           <p:nvPr/>
         </p:nvSpPr>
@@ -4755,7 +4979,7 @@
             <a:avLst/>
           </a:prstGeom>
           <a:solidFill>
-            <a:srgbClr val="AE4329"/>
+            <a:srgbClr val="D88C79"/>
           </a:solidFill>
           <a:ln w="38100">
             <a:solidFill>
@@ -4773,7 +4997,7 @@
       </p:sp>
       <p:sp>
         <p:nvSpPr>
-          <p:cNvPr id="18" name="TextBox 17"/>
+          <p:cNvPr id="20" name="TextBox 19"/>
           <p:cNvSpPr txBox="1"/>
           <p:nvPr/>
         </p:nvSpPr>
@@ -4801,7 +5025,7 @@
             <a:r>
               <a:rPr sz="1600" b="1" i="0">
                 <a:solidFill>
-                  <a:srgbClr val="AE4329"/>
+                  <a:srgbClr val="D88C79"/>
                 </a:solidFill>
               </a:rPr>
               <a:t>집으로</a:t>
@@ -4811,7 +5035,7 @@
       </p:sp>
       <p:sp>
         <p:nvSpPr>
-          <p:cNvPr id="19" name="TextBox 18"/>
+          <p:cNvPr id="21" name="TextBox 20"/>
           <p:cNvSpPr txBox="1"/>
           <p:nvPr/>
         </p:nvSpPr>
@@ -4839,7 +5063,7 @@
             <a:r>
               <a:rPr sz="1800" b="1" i="0">
                 <a:solidFill>
-                  <a:srgbClr val="5B2315"/>
+                  <a:srgbClr val="492E27"/>
                 </a:solidFill>
               </a:rPr>
               <a:t>함께 돌아온 날</a:t>
@@ -4849,7 +5073,7 @@
       </p:sp>
       <p:sp>
         <p:nvSpPr>
-          <p:cNvPr id="20" name="TextBox 19"/>
+          <p:cNvPr id="22" name="TextBox 21"/>
           <p:cNvSpPr txBox="1"/>
           <p:nvPr/>
         </p:nvSpPr>
@@ -4877,7 +5101,7 @@
             <a:r>
               <a:rPr sz="1500" b="0" i="0">
                 <a:solidFill>
-                  <a:srgbClr val="2B2B2B"/>
+                  <a:srgbClr val="26231F"/>
                 </a:solidFill>
               </a:rPr>
               <a:t>기억을 적어 주세요</a:t>
@@ -4899,7 +5123,7 @@
     <p:bg>
       <p:bgPr>
         <a:solidFill>
-          <a:srgbClr val="FBF1EE"/>
+          <a:srgbClr val="FBEFEC"/>
         </a:solidFill>
         <a:effectLst/>
       </p:bgPr>
@@ -4918,18 +5142,82 @@
           <p:nvPr/>
         </p:nvSpPr>
         <p:spPr>
-          <a:xfrm rot="10800000">
-            <a:off x="10637215" y="0"/>
-            <a:ext cx="914400" cy="1554480"/>
-          </a:xfrm>
-          <a:prstGeom prst="round2SameRect">
-            <a:avLst>
-              <a:gd name="adj1" fmla="val 50000"/>
-              <a:gd name="adj2" fmla="val 0"/>
-            </a:avLst>
+          <a:xfrm>
+            <a:off x="640080" y="6400800"/>
+            <a:ext cx="10911535" cy="10972"/>
+          </a:xfrm>
+          <a:prstGeom prst="rect">
+            <a:avLst/>
           </a:prstGeom>
           <a:solidFill>
-            <a:srgbClr val="F5D4CC"/>
+            <a:srgbClr val="26231F"/>
+          </a:solidFill>
+          <a:ln>
+            <a:noFill/>
+          </a:ln>
+        </p:spPr>
+        <p:txBody>
+          <a:bodyPr rtlCol="0" anchor="ctr"/>
+          <a:lstStyle/>
+          <a:p>
+            <a:pPr algn="ctr"/>
+          </a:p>
+        </p:txBody>
+      </p:sp>
+      <p:sp>
+        <p:nvSpPr>
+          <p:cNvPr id="4" name="하단 라벨"/>
+          <p:cNvSpPr txBox="1"/>
+          <p:nvPr/>
+        </p:nvSpPr>
+        <p:spPr>
+          <a:xfrm>
+            <a:off x="640080" y="6437376"/>
+            <a:ext cx="5486400" cy="274320"/>
+          </a:xfrm>
+          <a:prstGeom prst="rect">
+            <a:avLst/>
+          </a:prstGeom>
+          <a:noFill/>
+        </p:spPr>
+        <p:txBody>
+          <a:bodyPr wrap="square" lIns="54864" rIns="54864" tIns="27432" bIns="27432" anchor="ctr">
+            <a:noAutofit/>
+          </a:bodyPr>
+          <a:lstStyle/>
+          <a:p>
+            <a:pPr algn="l">
+              <a:lnSpc>
+                <a:spcPct val="115000"/>
+              </a:lnSpc>
+            </a:pPr>
+            <a:r>
+              <a:rPr sz="900" b="1" i="0" spc="250">
+                <a:solidFill>
+                  <a:srgbClr val="26231F"/>
+                </a:solidFill>
+              </a:rPr>
+              <a:t>FIRST BIRTHDAY</a:t>
+            </a:r>
+          </a:p>
+        </p:txBody>
+      </p:sp>
+      <p:sp>
+        <p:nvSpPr>
+          <p:cNvPr id="5" name="포인트"/>
+          <p:cNvSpPr/>
+          <p:nvPr/>
+        </p:nvSpPr>
+        <p:spPr>
+          <a:xfrm>
+            <a:off x="11213287" y="6473952"/>
+            <a:ext cx="219456" cy="219456"/>
+          </a:xfrm>
+          <a:prstGeom prst="ellipse">
+            <a:avLst/>
+          </a:prstGeom>
+          <a:solidFill>
+            <a:srgbClr val="D88C79"/>
           </a:solidFill>
           <a:ln>
             <a:noFill/>
@@ -4955,8 +5243,8 @@
         </p:nvSpPr>
         <p:spPr>
           <a:xfrm>
-            <a:off x="640080" y="457200"/>
-            <a:ext cx="9722815" cy="868680"/>
+            <a:off x="640080" y="502920"/>
+            <a:ext cx="10911535" cy="914400"/>
           </a:xfrm>
         </p:spPr>
         <p:txBody>
@@ -4973,7 +5261,7 @@
             <a:r>
               <a:rPr sz="3000" b="1" i="0">
                 <a:solidFill>
-                  <a:srgbClr val="5B2315"/>
+                  <a:srgbClr val="26231F"/>
                 </a:solidFill>
               </a:rPr>
               <a:t>첫 번째 순간들</a:t>
@@ -4983,26 +5271,26 @@
       </p:sp>
       <p:sp>
         <p:nvSpPr>
-          <p:cNvPr id="4" name="카드 1"/>
+          <p:cNvPr id="6" name="카드 1"/>
           <p:cNvSpPr/>
           <p:nvPr/>
         </p:nvSpPr>
         <p:spPr>
           <a:xfrm>
             <a:off x="640080" y="1600200"/>
-            <a:ext cx="2556433" cy="4800600"/>
+            <a:ext cx="2556433" cy="4572000"/>
           </a:xfrm>
           <a:prstGeom prst="roundRect">
             <a:avLst>
-              <a:gd name="adj" fmla="val 8000"/>
+              <a:gd name="adj" fmla="val 7000"/>
             </a:avLst>
           </a:prstGeom>
           <a:solidFill>
-            <a:srgbClr val="FBF1EE"/>
+            <a:srgbClr val="FFFFFF"/>
           </a:solidFill>
-          <a:ln w="15875">
+          <a:ln w="12700">
             <a:solidFill>
-              <a:srgbClr val="F5D4CC"/>
+              <a:srgbClr val="EBBAAD"/>
             </a:solidFill>
           </a:ln>
         </p:spPr>
@@ -5016,7 +5304,7 @@
       </p:sp>
       <p:sp>
         <p:nvSpPr>
-          <p:cNvPr id="5" name="번호 1"/>
+          <p:cNvPr id="7" name="번호 1"/>
           <p:cNvSpPr/>
           <p:nvPr/>
         </p:nvSpPr>
@@ -5025,11 +5313,13 @@
             <a:off x="822959" y="1783080"/>
             <a:ext cx="457200" cy="457200"/>
           </a:xfrm>
-          <a:prstGeom prst="ellipse">
-            <a:avLst/>
+          <a:prstGeom prst="roundRect">
+            <a:avLst>
+              <a:gd name="adj" fmla="val 25000"/>
+            </a:avLst>
           </a:prstGeom>
           <a:solidFill>
-            <a:srgbClr val="AE4329"/>
+            <a:srgbClr val="D88C79"/>
           </a:solidFill>
           <a:ln>
             <a:noFill/>
@@ -5049,7 +5339,7 @@
             <a:r>
               <a:rPr sz="1600" b="1" i="0">
                 <a:solidFill>
-                  <a:srgbClr val="FFFFFF"/>
+                  <a:srgbClr val="26231F"/>
                 </a:solidFill>
               </a:rPr>
               <a:t>1</a:t>
@@ -5059,7 +5349,7 @@
       </p:sp>
       <p:sp>
         <p:nvSpPr>
-          <p:cNvPr id="6" name="TextBox 5"/>
+          <p:cNvPr id="8" name="TextBox 7"/>
           <p:cNvSpPr txBox="1"/>
           <p:nvPr/>
         </p:nvSpPr>
@@ -5087,7 +5377,7 @@
             <a:r>
               <a:rPr sz="1800" b="1" i="0">
                 <a:solidFill>
-                  <a:srgbClr val="5B2315"/>
+                  <a:srgbClr val="492E27"/>
                 </a:solidFill>
               </a:rPr>
               <a:t>첫 웃음</a:t>
@@ -5097,14 +5387,14 @@
       </p:sp>
       <p:sp>
         <p:nvSpPr>
-          <p:cNvPr id="7" name="TextBox 6"/>
+          <p:cNvPr id="9" name="TextBox 8"/>
           <p:cNvSpPr txBox="1"/>
           <p:nvPr/>
         </p:nvSpPr>
         <p:spPr>
           <a:xfrm>
             <a:off x="777240" y="3063240"/>
-            <a:ext cx="2282113" cy="3200400"/>
+            <a:ext cx="2282113" cy="2971800"/>
           </a:xfrm>
           <a:prstGeom prst="rect">
             <a:avLst/>
@@ -5125,7 +5415,7 @@
             <a:r>
               <a:rPr sz="1500" b="0" i="0">
                 <a:solidFill>
-                  <a:srgbClr val="2B2B2B"/>
+                  <a:srgbClr val="26231F"/>
                 </a:solidFill>
               </a:rPr>
               <a:t>언제였나요?</a:t>
@@ -5135,26 +5425,26 @@
       </p:sp>
       <p:sp>
         <p:nvSpPr>
-          <p:cNvPr id="8" name="카드 2"/>
+          <p:cNvPr id="10" name="카드 2"/>
           <p:cNvSpPr/>
           <p:nvPr/>
         </p:nvSpPr>
         <p:spPr>
           <a:xfrm>
             <a:off x="3425113" y="1600200"/>
-            <a:ext cx="2556433" cy="4800600"/>
+            <a:ext cx="2556433" cy="4572000"/>
           </a:xfrm>
           <a:prstGeom prst="roundRect">
             <a:avLst>
-              <a:gd name="adj" fmla="val 8000"/>
+              <a:gd name="adj" fmla="val 7000"/>
             </a:avLst>
           </a:prstGeom>
           <a:solidFill>
-            <a:srgbClr val="FBF1EE"/>
+            <a:srgbClr val="FFFFFF"/>
           </a:solidFill>
-          <a:ln w="15875">
+          <a:ln w="12700">
             <a:solidFill>
-              <a:srgbClr val="F5D4CC"/>
+              <a:srgbClr val="EBBAAD"/>
             </a:solidFill>
           </a:ln>
         </p:spPr>
@@ -5168,7 +5458,7 @@
       </p:sp>
       <p:sp>
         <p:nvSpPr>
-          <p:cNvPr id="9" name="번호 2"/>
+          <p:cNvPr id="11" name="번호 2"/>
           <p:cNvSpPr/>
           <p:nvPr/>
         </p:nvSpPr>
@@ -5177,11 +5467,13 @@
             <a:off x="3607993" y="1783080"/>
             <a:ext cx="457200" cy="457200"/>
           </a:xfrm>
-          <a:prstGeom prst="ellipse">
-            <a:avLst/>
+          <a:prstGeom prst="roundRect">
+            <a:avLst>
+              <a:gd name="adj" fmla="val 25000"/>
+            </a:avLst>
           </a:prstGeom>
           <a:solidFill>
-            <a:srgbClr val="AE4329"/>
+            <a:srgbClr val="D88C79"/>
           </a:solidFill>
           <a:ln>
             <a:noFill/>
@@ -5201,7 +5493,7 @@
             <a:r>
               <a:rPr sz="1600" b="1" i="0">
                 <a:solidFill>
-                  <a:srgbClr val="FFFFFF"/>
+                  <a:srgbClr val="26231F"/>
                 </a:solidFill>
               </a:rPr>
               <a:t>2</a:t>
@@ -5211,7 +5503,7 @@
       </p:sp>
       <p:sp>
         <p:nvSpPr>
-          <p:cNvPr id="10" name="TextBox 9"/>
+          <p:cNvPr id="12" name="TextBox 11"/>
           <p:cNvSpPr txBox="1"/>
           <p:nvPr/>
         </p:nvSpPr>
@@ -5239,7 +5531,7 @@
             <a:r>
               <a:rPr sz="1800" b="1" i="0">
                 <a:solidFill>
-                  <a:srgbClr val="5B2315"/>
+                  <a:srgbClr val="492E27"/>
                 </a:solidFill>
               </a:rPr>
               <a:t>첫 뒤집기</a:t>
@@ -5249,14 +5541,14 @@
       </p:sp>
       <p:sp>
         <p:nvSpPr>
-          <p:cNvPr id="11" name="TextBox 10"/>
+          <p:cNvPr id="13" name="TextBox 12"/>
           <p:cNvSpPr txBox="1"/>
           <p:nvPr/>
         </p:nvSpPr>
         <p:spPr>
           <a:xfrm>
             <a:off x="3562273" y="3063240"/>
-            <a:ext cx="2282113" cy="3200400"/>
+            <a:ext cx="2282113" cy="2971800"/>
           </a:xfrm>
           <a:prstGeom prst="rect">
             <a:avLst/>
@@ -5277,7 +5569,7 @@
             <a:r>
               <a:rPr sz="1500" b="0" i="0">
                 <a:solidFill>
-                  <a:srgbClr val="2B2B2B"/>
+                  <a:srgbClr val="26231F"/>
                 </a:solidFill>
               </a:rPr>
               <a:t>언제였나요?</a:t>
@@ -5287,26 +5579,26 @@
       </p:sp>
       <p:sp>
         <p:nvSpPr>
-          <p:cNvPr id="12" name="카드 3"/>
+          <p:cNvPr id="14" name="카드 3"/>
           <p:cNvSpPr/>
           <p:nvPr/>
         </p:nvSpPr>
         <p:spPr>
           <a:xfrm>
             <a:off x="6210147" y="1600200"/>
-            <a:ext cx="2556433" cy="4800600"/>
+            <a:ext cx="2556433" cy="4572000"/>
           </a:xfrm>
           <a:prstGeom prst="roundRect">
             <a:avLst>
-              <a:gd name="adj" fmla="val 8000"/>
+              <a:gd name="adj" fmla="val 7000"/>
             </a:avLst>
           </a:prstGeom>
           <a:solidFill>
-            <a:srgbClr val="FBF1EE"/>
+            <a:srgbClr val="FFFFFF"/>
           </a:solidFill>
-          <a:ln w="15875">
+          <a:ln w="12700">
             <a:solidFill>
-              <a:srgbClr val="F5D4CC"/>
+              <a:srgbClr val="EBBAAD"/>
             </a:solidFill>
           </a:ln>
         </p:spPr>
@@ -5320,7 +5612,7 @@
       </p:sp>
       <p:sp>
         <p:nvSpPr>
-          <p:cNvPr id="13" name="번호 3"/>
+          <p:cNvPr id="15" name="번호 3"/>
           <p:cNvSpPr/>
           <p:nvPr/>
         </p:nvSpPr>
@@ -5329,11 +5621,13 @@
             <a:off x="6393027" y="1783080"/>
             <a:ext cx="457200" cy="457200"/>
           </a:xfrm>
-          <a:prstGeom prst="ellipse">
-            <a:avLst/>
+          <a:prstGeom prst="roundRect">
+            <a:avLst>
+              <a:gd name="adj" fmla="val 25000"/>
+            </a:avLst>
           </a:prstGeom>
           <a:solidFill>
-            <a:srgbClr val="AE4329"/>
+            <a:srgbClr val="D88C79"/>
           </a:solidFill>
           <a:ln>
             <a:noFill/>
@@ -5353,7 +5647,7 @@
             <a:r>
               <a:rPr sz="1600" b="1" i="0">
                 <a:solidFill>
-                  <a:srgbClr val="FFFFFF"/>
+                  <a:srgbClr val="26231F"/>
                 </a:solidFill>
               </a:rPr>
               <a:t>3</a:t>
@@ -5363,7 +5657,7 @@
       </p:sp>
       <p:sp>
         <p:nvSpPr>
-          <p:cNvPr id="14" name="TextBox 13"/>
+          <p:cNvPr id="16" name="TextBox 15"/>
           <p:cNvSpPr txBox="1"/>
           <p:nvPr/>
         </p:nvSpPr>
@@ -5391,7 +5685,7 @@
             <a:r>
               <a:rPr sz="1800" b="1" i="0">
                 <a:solidFill>
-                  <a:srgbClr val="5B2315"/>
+                  <a:srgbClr val="492E27"/>
                 </a:solidFill>
               </a:rPr>
               <a:t>첫 이</a:t>
@@ -5401,14 +5695,14 @@
       </p:sp>
       <p:sp>
         <p:nvSpPr>
-          <p:cNvPr id="15" name="TextBox 14"/>
+          <p:cNvPr id="17" name="TextBox 16"/>
           <p:cNvSpPr txBox="1"/>
           <p:nvPr/>
         </p:nvSpPr>
         <p:spPr>
           <a:xfrm>
             <a:off x="6347307" y="3063240"/>
-            <a:ext cx="2282113" cy="3200400"/>
+            <a:ext cx="2282113" cy="2971800"/>
           </a:xfrm>
           <a:prstGeom prst="rect">
             <a:avLst/>
@@ -5429,7 +5723,7 @@
             <a:r>
               <a:rPr sz="1500" b="0" i="0">
                 <a:solidFill>
-                  <a:srgbClr val="2B2B2B"/>
+                  <a:srgbClr val="26231F"/>
                 </a:solidFill>
               </a:rPr>
               <a:t>언제였나요?</a:t>
@@ -5439,26 +5733,26 @@
       </p:sp>
       <p:sp>
         <p:nvSpPr>
-          <p:cNvPr id="16" name="카드 4"/>
+          <p:cNvPr id="18" name="카드 4"/>
           <p:cNvSpPr/>
           <p:nvPr/>
         </p:nvSpPr>
         <p:spPr>
           <a:xfrm>
             <a:off x="8995181" y="1600200"/>
-            <a:ext cx="2556433" cy="4800600"/>
+            <a:ext cx="2556433" cy="4572000"/>
           </a:xfrm>
           <a:prstGeom prst="roundRect">
             <a:avLst>
-              <a:gd name="adj" fmla="val 8000"/>
+              <a:gd name="adj" fmla="val 7000"/>
             </a:avLst>
           </a:prstGeom>
           <a:solidFill>
-            <a:srgbClr val="FBF1EE"/>
+            <a:srgbClr val="FFFFFF"/>
           </a:solidFill>
-          <a:ln w="15875">
+          <a:ln w="12700">
             <a:solidFill>
-              <a:srgbClr val="F5D4CC"/>
+              <a:srgbClr val="EBBAAD"/>
             </a:solidFill>
           </a:ln>
         </p:spPr>
@@ -5472,7 +5766,7 @@
       </p:sp>
       <p:sp>
         <p:nvSpPr>
-          <p:cNvPr id="17" name="번호 4"/>
+          <p:cNvPr id="19" name="번호 4"/>
           <p:cNvSpPr/>
           <p:nvPr/>
         </p:nvSpPr>
@@ -5481,11 +5775,13 @@
             <a:off x="9178061" y="1783080"/>
             <a:ext cx="457200" cy="457200"/>
           </a:xfrm>
-          <a:prstGeom prst="ellipse">
-            <a:avLst/>
+          <a:prstGeom prst="roundRect">
+            <a:avLst>
+              <a:gd name="adj" fmla="val 25000"/>
+            </a:avLst>
           </a:prstGeom>
           <a:solidFill>
-            <a:srgbClr val="AE4329"/>
+            <a:srgbClr val="D88C79"/>
           </a:solidFill>
           <a:ln>
             <a:noFill/>
@@ -5505,7 +5801,7 @@
             <a:r>
               <a:rPr sz="1600" b="1" i="0">
                 <a:solidFill>
-                  <a:srgbClr val="FFFFFF"/>
+                  <a:srgbClr val="26231F"/>
                 </a:solidFill>
               </a:rPr>
               <a:t>4</a:t>
@@ -5515,7 +5811,7 @@
       </p:sp>
       <p:sp>
         <p:nvSpPr>
-          <p:cNvPr id="18" name="TextBox 17"/>
+          <p:cNvPr id="20" name="TextBox 19"/>
           <p:cNvSpPr txBox="1"/>
           <p:nvPr/>
         </p:nvSpPr>
@@ -5543,7 +5839,7 @@
             <a:r>
               <a:rPr sz="1800" b="1" i="0">
                 <a:solidFill>
-                  <a:srgbClr val="5B2315"/>
+                  <a:srgbClr val="492E27"/>
                 </a:solidFill>
               </a:rPr>
               <a:t>첫 걸음</a:t>
@@ -5553,14 +5849,14 @@
       </p:sp>
       <p:sp>
         <p:nvSpPr>
-          <p:cNvPr id="19" name="TextBox 18"/>
+          <p:cNvPr id="21" name="TextBox 20"/>
           <p:cNvSpPr txBox="1"/>
           <p:nvPr/>
         </p:nvSpPr>
         <p:spPr>
           <a:xfrm>
             <a:off x="9132341" y="3063240"/>
-            <a:ext cx="2282113" cy="3200400"/>
+            <a:ext cx="2282113" cy="2971800"/>
           </a:xfrm>
           <a:prstGeom prst="rect">
             <a:avLst/>
@@ -5581,7 +5877,7 @@
             <a:r>
               <a:rPr sz="1500" b="0" i="0">
                 <a:solidFill>
-                  <a:srgbClr val="2B2B2B"/>
+                  <a:srgbClr val="26231F"/>
                 </a:solidFill>
               </a:rPr>
               <a:t>언제였나요?</a:t>
@@ -5603,7 +5899,7 @@
     <p:bg>
       <p:bgPr>
         <a:solidFill>
-          <a:srgbClr val="FBF1EE"/>
+          <a:srgbClr val="FBEFEC"/>
         </a:solidFill>
         <a:effectLst/>
       </p:bgPr>
@@ -5622,18 +5918,82 @@
           <p:nvPr/>
         </p:nvSpPr>
         <p:spPr>
-          <a:xfrm rot="10800000">
-            <a:off x="10637215" y="0"/>
-            <a:ext cx="914400" cy="1554480"/>
-          </a:xfrm>
-          <a:prstGeom prst="round2SameRect">
-            <a:avLst>
-              <a:gd name="adj1" fmla="val 50000"/>
-              <a:gd name="adj2" fmla="val 0"/>
-            </a:avLst>
+          <a:xfrm>
+            <a:off x="640080" y="6400800"/>
+            <a:ext cx="10911535" cy="10972"/>
+          </a:xfrm>
+          <a:prstGeom prst="rect">
+            <a:avLst/>
           </a:prstGeom>
           <a:solidFill>
-            <a:srgbClr val="F5D4CC"/>
+            <a:srgbClr val="26231F"/>
+          </a:solidFill>
+          <a:ln>
+            <a:noFill/>
+          </a:ln>
+        </p:spPr>
+        <p:txBody>
+          <a:bodyPr rtlCol="0" anchor="ctr"/>
+          <a:lstStyle/>
+          <a:p>
+            <a:pPr algn="ctr"/>
+          </a:p>
+        </p:txBody>
+      </p:sp>
+      <p:sp>
+        <p:nvSpPr>
+          <p:cNvPr id="4" name="하단 라벨"/>
+          <p:cNvSpPr txBox="1"/>
+          <p:nvPr/>
+        </p:nvSpPr>
+        <p:spPr>
+          <a:xfrm>
+            <a:off x="640080" y="6437376"/>
+            <a:ext cx="5486400" cy="274320"/>
+          </a:xfrm>
+          <a:prstGeom prst="rect">
+            <a:avLst/>
+          </a:prstGeom>
+          <a:noFill/>
+        </p:spPr>
+        <p:txBody>
+          <a:bodyPr wrap="square" lIns="54864" rIns="54864" tIns="27432" bIns="27432" anchor="ctr">
+            <a:noAutofit/>
+          </a:bodyPr>
+          <a:lstStyle/>
+          <a:p>
+            <a:pPr algn="l">
+              <a:lnSpc>
+                <a:spcPct val="115000"/>
+              </a:lnSpc>
+            </a:pPr>
+            <a:r>
+              <a:rPr sz="900" b="1" i="0" spc="250">
+                <a:solidFill>
+                  <a:srgbClr val="26231F"/>
+                </a:solidFill>
+              </a:rPr>
+              <a:t>FIRST BIRTHDAY</a:t>
+            </a:r>
+          </a:p>
+        </p:txBody>
+      </p:sp>
+      <p:sp>
+        <p:nvSpPr>
+          <p:cNvPr id="5" name="포인트"/>
+          <p:cNvSpPr/>
+          <p:nvPr/>
+        </p:nvSpPr>
+        <p:spPr>
+          <a:xfrm>
+            <a:off x="11213287" y="6473952"/>
+            <a:ext cx="219456" cy="219456"/>
+          </a:xfrm>
+          <a:prstGeom prst="ellipse">
+            <a:avLst/>
+          </a:prstGeom>
+          <a:solidFill>
+            <a:srgbClr val="D88C79"/>
           </a:solidFill>
           <a:ln>
             <a:noFill/>
@@ -5659,8 +6019,8 @@
         </p:nvSpPr>
         <p:spPr>
           <a:xfrm>
-            <a:off x="640080" y="457200"/>
-            <a:ext cx="9722815" cy="868680"/>
+            <a:off x="640080" y="502920"/>
+            <a:ext cx="10911535" cy="914400"/>
           </a:xfrm>
         </p:spPr>
         <p:txBody>
@@ -5677,7 +6037,7 @@
             <a:r>
               <a:rPr sz="3000" b="1" i="0">
                 <a:solidFill>
-                  <a:srgbClr val="5B2315"/>
+                  <a:srgbClr val="26231F"/>
                 </a:solidFill>
               </a:rPr>
               <a:t>사진 모음</a:t>
@@ -5687,14 +6047,14 @@
       </p:sp>
       <p:sp>
         <p:nvSpPr>
-          <p:cNvPr id="4" name="사진 자리"/>
+          <p:cNvPr id="6" name="사진 자리"/>
           <p:cNvSpPr/>
           <p:nvPr/>
         </p:nvSpPr>
         <p:spPr>
           <a:xfrm>
             <a:off x="640080" y="1600200"/>
-            <a:ext cx="2590723" cy="2308860"/>
+            <a:ext cx="2590723" cy="2194560"/>
           </a:xfrm>
           <a:prstGeom prst="roundRect">
             <a:avLst>
@@ -5702,12 +6062,10 @@
             </a:avLst>
           </a:prstGeom>
           <a:solidFill>
-            <a:srgbClr val="F5D4CC"/>
+            <a:srgbClr val="F6DCD5"/>
           </a:solidFill>
           <a:ln w="19050">
-            <a:solidFill>
-              <a:srgbClr val="AE4329"/>
-            </a:solidFill>
+            <a:noFill/>
             <a:prstDash val="dash"/>
           </a:ln>
         </p:spPr>
@@ -5725,7 +6083,7 @@
             <a:r>
               <a:rPr sz="1200" b="0" i="0">
                 <a:solidFill>
-                  <a:srgbClr val="5B2315"/>
+                  <a:srgbClr val="8E8780"/>
                 </a:solidFill>
               </a:rPr>
               <a:t>사진 1</a:t>
@@ -5735,14 +6093,14 @@
       </p:sp>
       <p:sp>
         <p:nvSpPr>
-          <p:cNvPr id="5" name="사진 자리"/>
+          <p:cNvPr id="7" name="사진 자리"/>
           <p:cNvSpPr/>
           <p:nvPr/>
         </p:nvSpPr>
         <p:spPr>
           <a:xfrm>
             <a:off x="3413683" y="1600200"/>
-            <a:ext cx="2590723" cy="2308860"/>
+            <a:ext cx="2590723" cy="2194560"/>
           </a:xfrm>
           <a:prstGeom prst="roundRect">
             <a:avLst>
@@ -5750,12 +6108,10 @@
             </a:avLst>
           </a:prstGeom>
           <a:solidFill>
-            <a:srgbClr val="F5D4CC"/>
+            <a:srgbClr val="F6DCD5"/>
           </a:solidFill>
           <a:ln w="19050">
-            <a:solidFill>
-              <a:srgbClr val="AE4329"/>
-            </a:solidFill>
+            <a:noFill/>
             <a:prstDash val="dash"/>
           </a:ln>
         </p:spPr>
@@ -5773,7 +6129,7 @@
             <a:r>
               <a:rPr sz="1200" b="0" i="0">
                 <a:solidFill>
-                  <a:srgbClr val="5B2315"/>
+                  <a:srgbClr val="8E8780"/>
                 </a:solidFill>
               </a:rPr>
               <a:t>사진 2</a:t>
@@ -5783,14 +6139,14 @@
       </p:sp>
       <p:sp>
         <p:nvSpPr>
-          <p:cNvPr id="6" name="사진 자리"/>
+          <p:cNvPr id="8" name="사진 자리"/>
           <p:cNvSpPr/>
           <p:nvPr/>
         </p:nvSpPr>
         <p:spPr>
           <a:xfrm>
             <a:off x="6187287" y="1600200"/>
-            <a:ext cx="2590723" cy="2308860"/>
+            <a:ext cx="2590723" cy="2194560"/>
           </a:xfrm>
           <a:prstGeom prst="roundRect">
             <a:avLst>
@@ -5798,12 +6154,10 @@
             </a:avLst>
           </a:prstGeom>
           <a:solidFill>
-            <a:srgbClr val="F5D4CC"/>
+            <a:srgbClr val="F6DCD5"/>
           </a:solidFill>
           <a:ln w="19050">
-            <a:solidFill>
-              <a:srgbClr val="AE4329"/>
-            </a:solidFill>
+            <a:noFill/>
             <a:prstDash val="dash"/>
           </a:ln>
         </p:spPr>
@@ -5821,7 +6175,7 @@
             <a:r>
               <a:rPr sz="1200" b="0" i="0">
                 <a:solidFill>
-                  <a:srgbClr val="5B2315"/>
+                  <a:srgbClr val="8E8780"/>
                 </a:solidFill>
               </a:rPr>
               <a:t>사진 3</a:t>
@@ -5831,14 +6185,14 @@
       </p:sp>
       <p:sp>
         <p:nvSpPr>
-          <p:cNvPr id="7" name="사진 자리"/>
+          <p:cNvPr id="9" name="사진 자리"/>
           <p:cNvSpPr/>
           <p:nvPr/>
         </p:nvSpPr>
         <p:spPr>
           <a:xfrm>
             <a:off x="8960891" y="1600200"/>
-            <a:ext cx="2590723" cy="2308860"/>
+            <a:ext cx="2590723" cy="2194560"/>
           </a:xfrm>
           <a:prstGeom prst="roundRect">
             <a:avLst>
@@ -5846,12 +6200,10 @@
             </a:avLst>
           </a:prstGeom>
           <a:solidFill>
-            <a:srgbClr val="F5D4CC"/>
+            <a:srgbClr val="F6DCD5"/>
           </a:solidFill>
           <a:ln w="19050">
-            <a:solidFill>
-              <a:srgbClr val="AE4329"/>
-            </a:solidFill>
+            <a:noFill/>
             <a:prstDash val="dash"/>
           </a:ln>
         </p:spPr>
@@ -5869,7 +6221,7 @@
             <a:r>
               <a:rPr sz="1200" b="0" i="0">
                 <a:solidFill>
-                  <a:srgbClr val="5B2315"/>
+                  <a:srgbClr val="8E8780"/>
                 </a:solidFill>
               </a:rPr>
               <a:t>사진 4</a:t>
@@ -5879,14 +6231,14 @@
       </p:sp>
       <p:sp>
         <p:nvSpPr>
-          <p:cNvPr id="8" name="사진 자리"/>
+          <p:cNvPr id="10" name="사진 자리"/>
           <p:cNvSpPr/>
           <p:nvPr/>
         </p:nvSpPr>
         <p:spPr>
           <a:xfrm>
-            <a:off x="640080" y="4091939"/>
-            <a:ext cx="2590723" cy="2308860"/>
+            <a:off x="640080" y="3977639"/>
+            <a:ext cx="2590723" cy="2194560"/>
           </a:xfrm>
           <a:prstGeom prst="roundRect">
             <a:avLst>
@@ -5894,12 +6246,10 @@
             </a:avLst>
           </a:prstGeom>
           <a:solidFill>
-            <a:srgbClr val="F5D4CC"/>
+            <a:srgbClr val="F6DCD5"/>
           </a:solidFill>
           <a:ln w="19050">
-            <a:solidFill>
-              <a:srgbClr val="AE4329"/>
-            </a:solidFill>
+            <a:noFill/>
             <a:prstDash val="dash"/>
           </a:ln>
         </p:spPr>
@@ -5917,7 +6267,7 @@
             <a:r>
               <a:rPr sz="1200" b="0" i="0">
                 <a:solidFill>
-                  <a:srgbClr val="5B2315"/>
+                  <a:srgbClr val="8E8780"/>
                 </a:solidFill>
               </a:rPr>
               <a:t>사진 5</a:t>
@@ -5927,14 +6277,14 @@
       </p:sp>
       <p:sp>
         <p:nvSpPr>
-          <p:cNvPr id="9" name="사진 자리"/>
+          <p:cNvPr id="11" name="사진 자리"/>
           <p:cNvSpPr/>
           <p:nvPr/>
         </p:nvSpPr>
         <p:spPr>
           <a:xfrm>
-            <a:off x="3413683" y="4091939"/>
-            <a:ext cx="2590723" cy="2308860"/>
+            <a:off x="3413683" y="3977639"/>
+            <a:ext cx="2590723" cy="2194560"/>
           </a:xfrm>
           <a:prstGeom prst="roundRect">
             <a:avLst>
@@ -5942,12 +6292,10 @@
             </a:avLst>
           </a:prstGeom>
           <a:solidFill>
-            <a:srgbClr val="F5D4CC"/>
+            <a:srgbClr val="F6DCD5"/>
           </a:solidFill>
           <a:ln w="19050">
-            <a:solidFill>
-              <a:srgbClr val="AE4329"/>
-            </a:solidFill>
+            <a:noFill/>
             <a:prstDash val="dash"/>
           </a:ln>
         </p:spPr>
@@ -5965,7 +6313,7 @@
             <a:r>
               <a:rPr sz="1200" b="0" i="0">
                 <a:solidFill>
-                  <a:srgbClr val="5B2315"/>
+                  <a:srgbClr val="8E8780"/>
                 </a:solidFill>
               </a:rPr>
               <a:t>사진 6</a:t>
@@ -5975,14 +6323,14 @@
       </p:sp>
       <p:sp>
         <p:nvSpPr>
-          <p:cNvPr id="10" name="사진 자리"/>
+          <p:cNvPr id="12" name="사진 자리"/>
           <p:cNvSpPr/>
           <p:nvPr/>
         </p:nvSpPr>
         <p:spPr>
           <a:xfrm>
-            <a:off x="6187287" y="4091939"/>
-            <a:ext cx="2590723" cy="2308860"/>
+            <a:off x="6187287" y="3977639"/>
+            <a:ext cx="2590723" cy="2194560"/>
           </a:xfrm>
           <a:prstGeom prst="roundRect">
             <a:avLst>
@@ -5990,12 +6338,10 @@
             </a:avLst>
           </a:prstGeom>
           <a:solidFill>
-            <a:srgbClr val="F5D4CC"/>
+            <a:srgbClr val="F6DCD5"/>
           </a:solidFill>
           <a:ln w="19050">
-            <a:solidFill>
-              <a:srgbClr val="AE4329"/>
-            </a:solidFill>
+            <a:noFill/>
             <a:prstDash val="dash"/>
           </a:ln>
         </p:spPr>
@@ -6013,7 +6359,7 @@
             <a:r>
               <a:rPr sz="1200" b="0" i="0">
                 <a:solidFill>
-                  <a:srgbClr val="5B2315"/>
+                  <a:srgbClr val="8E8780"/>
                 </a:solidFill>
               </a:rPr>
               <a:t>사진 7</a:t>
@@ -6023,14 +6369,14 @@
       </p:sp>
       <p:sp>
         <p:nvSpPr>
-          <p:cNvPr id="11" name="사진 자리"/>
+          <p:cNvPr id="13" name="사진 자리"/>
           <p:cNvSpPr/>
           <p:nvPr/>
         </p:nvSpPr>
         <p:spPr>
           <a:xfrm>
-            <a:off x="8960891" y="4091939"/>
-            <a:ext cx="2590723" cy="2308860"/>
+            <a:off x="8960891" y="3977639"/>
+            <a:ext cx="2590723" cy="2194560"/>
           </a:xfrm>
           <a:prstGeom prst="roundRect">
             <a:avLst>
@@ -6038,12 +6384,10 @@
             </a:avLst>
           </a:prstGeom>
           <a:solidFill>
-            <a:srgbClr val="F5D4CC"/>
+            <a:srgbClr val="F6DCD5"/>
           </a:solidFill>
           <a:ln w="19050">
-            <a:solidFill>
-              <a:srgbClr val="AE4329"/>
-            </a:solidFill>
+            <a:noFill/>
             <a:prstDash val="dash"/>
           </a:ln>
         </p:spPr>
@@ -6061,7 +6405,7 @@
             <a:r>
               <a:rPr sz="1200" b="0" i="0">
                 <a:solidFill>
-                  <a:srgbClr val="5B2315"/>
+                  <a:srgbClr val="8E8780"/>
                 </a:solidFill>
               </a:rPr>
               <a:t>사진 8</a:t>
@@ -6080,6 +6424,14 @@
 <file path=ppt/slides/slide6.xml><?xml version="1.0" encoding="utf-8"?>
 <p:sld xmlns:a="http://schemas.openxmlformats.org/drawingml/2006/main" xmlns:p="http://schemas.openxmlformats.org/presentationml/2006/main" xmlns:r="http://schemas.openxmlformats.org/officeDocument/2006/relationships">
   <p:cSld>
+    <p:bg>
+      <p:bgPr>
+        <a:solidFill>
+          <a:srgbClr val="FBEFEC"/>
+        </a:solidFill>
+        <a:effectLst/>
+      </p:bgPr>
+    </p:bg>
     <p:spTree>
       <p:nvGrpSpPr>
         <p:cNvPr id="1" name=""/>
@@ -6087,30 +6439,120 @@
         <p:nvPr/>
       </p:nvGrpSpPr>
       <p:grpSpPr/>
-      <p:pic>
-        <p:nvPicPr>
-          <p:cNvPr id="3" name="표지 그림" descr="birthday-30.jpg"/>
-          <p:cNvPicPr>
-            <a:picLocks noChangeAspect="1"/>
-          </p:cNvPicPr>
+      <p:sp>
+        <p:nvSpPr>
+          <p:cNvPr id="3" name="사진 자리"/>
+          <p:cNvSpPr/>
           <p:nvPr/>
-        </p:nvPicPr>
-        <p:blipFill>
-          <a:blip r:embed="rId2"/>
-          <a:stretch>
-            <a:fillRect/>
-          </a:stretch>
-        </p:blipFill>
-        <p:spPr>
-          <a:xfrm>
-            <a:off x="0" y="0"/>
-            <a:ext cx="12191695" cy="6858000"/>
+        </p:nvSpPr>
+        <p:spPr>
+          <a:xfrm>
+            <a:off x="7071183" y="960120"/>
+            <a:ext cx="3657508" cy="4526280"/>
+          </a:xfrm>
+          <a:prstGeom prst="roundRect">
+            <a:avLst>
+              <a:gd name="adj" fmla="val 4000"/>
+            </a:avLst>
+          </a:prstGeom>
+          <a:solidFill>
+            <a:srgbClr val="EBBAAD"/>
+          </a:solidFill>
+          <a:ln>
+            <a:noFill/>
+          </a:ln>
+        </p:spPr>
+        <p:txBody>
+          <a:bodyPr rtlCol="0" anchor="ctr" wrap="square" lIns="54864" rIns="54864" tIns="27432" bIns="27432">
+            <a:noAutofit/>
+          </a:bodyPr>
+          <a:lstStyle/>
+          <a:p>
+            <a:pPr algn="ctr">
+              <a:lnSpc>
+                <a:spcPct val="100000"/>
+              </a:lnSpc>
+            </a:pPr>
+            <a:r>
+              <a:rPr sz="1400" b="0" i="0">
+                <a:solidFill>
+                  <a:srgbClr val="492E27"/>
+                </a:solidFill>
+              </a:rPr>
+              <a:t>사진을 넣어 주세요</a:t>
+            </a:r>
+          </a:p>
+        </p:txBody>
+      </p:sp>
+      <p:sp>
+        <p:nvSpPr>
+          <p:cNvPr id="4" name="장식"/>
+          <p:cNvSpPr/>
+          <p:nvPr/>
+        </p:nvSpPr>
+        <p:spPr>
+          <a:xfrm>
+            <a:off x="7558851" y="1234439"/>
+            <a:ext cx="3657508" cy="4526280"/>
+          </a:xfrm>
+          <a:prstGeom prst="roundRect">
+            <a:avLst>
+              <a:gd name="adj" fmla="val 4000"/>
+            </a:avLst>
+          </a:prstGeom>
+          <a:noFill/>
+          <a:ln w="9525">
+            <a:solidFill>
+              <a:srgbClr val="26231F"/>
+            </a:solidFill>
+          </a:ln>
+        </p:spPr>
+        <p:txBody>
+          <a:bodyPr rtlCol="0" anchor="ctr"/>
+          <a:lstStyle/>
+          <a:p>
+            <a:pPr algn="ctr"/>
+          </a:p>
+        </p:txBody>
+      </p:sp>
+      <p:sp>
+        <p:nvSpPr>
+          <p:cNvPr id="5" name="라벨"/>
+          <p:cNvSpPr txBox="1"/>
+          <p:nvPr/>
+        </p:nvSpPr>
+        <p:spPr>
+          <a:xfrm>
+            <a:off x="822960" y="2148840"/>
+            <a:ext cx="5608179" cy="274320"/>
           </a:xfrm>
           <a:prstGeom prst="rect">
             <a:avLst/>
           </a:prstGeom>
-        </p:spPr>
-      </p:pic>
+          <a:noFill/>
+        </p:spPr>
+        <p:txBody>
+          <a:bodyPr wrap="square" lIns="54864" rIns="54864" tIns="27432" bIns="27432" anchor="t">
+            <a:noAutofit/>
+          </a:bodyPr>
+          <a:lstStyle/>
+          <a:p>
+            <a:pPr algn="l">
+              <a:lnSpc>
+                <a:spcPct val="115000"/>
+              </a:lnSpc>
+            </a:pPr>
+            <a:r>
+              <a:rPr sz="1000" b="1" i="0" spc="250">
+                <a:solidFill>
+                  <a:srgbClr val="26231F"/>
+                </a:solidFill>
+              </a:rPr>
+              <a:t>FIRST BIRTHDAY</a:t>
+            </a:r>
+          </a:p>
+        </p:txBody>
+      </p:sp>
       <p:sp>
         <p:nvSpPr>
           <p:cNvPr id="2" name="Title 1"/>
@@ -6123,8 +6565,8 @@
         </p:nvSpPr>
         <p:spPr>
           <a:xfrm>
-            <a:off x="853418" y="2057400"/>
-            <a:ext cx="6095847" cy="1554480"/>
+            <a:off x="822960" y="2606040"/>
+            <a:ext cx="5608179" cy="1188720"/>
           </a:xfrm>
         </p:spPr>
         <p:txBody>
@@ -6141,7 +6583,7 @@
             <a:r>
               <a:rPr sz="3400" b="1" i="0">
                 <a:solidFill>
-                  <a:srgbClr val="5B2315"/>
+                  <a:srgbClr val="26231F"/>
                 </a:solidFill>
               </a:rPr>
               <a:t>와 주셔서 고맙습니다</a:t>
@@ -6151,14 +6593,14 @@
       </p:sp>
       <p:sp>
         <p:nvSpPr>
-          <p:cNvPr id="4" name="한 줄 문구"/>
+          <p:cNvPr id="6" name="한 줄 문구"/>
           <p:cNvSpPr txBox="1"/>
           <p:nvPr/>
         </p:nvSpPr>
         <p:spPr>
           <a:xfrm>
-            <a:off x="853418" y="3749039"/>
-            <a:ext cx="6095847" cy="822960"/>
+            <a:off x="822960" y="3886200"/>
+            <a:ext cx="5608179" cy="822960"/>
           </a:xfrm>
           <a:prstGeom prst="rect">
             <a:avLst/>
@@ -6177,9 +6619,9 @@
               </a:lnSpc>
             </a:pPr>
             <a:r>
-              <a:rPr sz="1700" b="0" i="1">
-                <a:solidFill>
-                  <a:srgbClr val="5B2315"/>
+              <a:rPr sz="1700" b="0" i="0">
+                <a:solidFill>
+                  <a:srgbClr val="26231F"/>
                 </a:solidFill>
               </a:rPr>
               <a:t>아이가 한 살이 되었습니다</a:t>
@@ -6189,14 +6631,14 @@
       </p:sp>
       <p:sp>
         <p:nvSpPr>
-          <p:cNvPr id="5" name="안내 문구"/>
+          <p:cNvPr id="7" name="안내 문구"/>
           <p:cNvSpPr txBox="1"/>
           <p:nvPr/>
         </p:nvSpPr>
         <p:spPr>
           <a:xfrm>
-            <a:off x="853418" y="4617720"/>
-            <a:ext cx="6095847" cy="914400"/>
+            <a:off x="822960" y="4754880"/>
+            <a:ext cx="5608179" cy="914400"/>
           </a:xfrm>
           <a:prstGeom prst="rect">
             <a:avLst/>
@@ -6217,7 +6659,7 @@
             <a:r>
               <a:rPr sz="1400" b="0" i="0">
                 <a:solidFill>
-                  <a:srgbClr val="666666"/>
+                  <a:srgbClr val="26231F"/>
                 </a:solidFill>
               </a:rPr>
               <a:t>아기 이름 · 부모 이름</a:t>
@@ -6244,34 +6686,34 @@
         <a:sysClr val="window" lastClr="FFFFFF"/>
       </a:lt1>
       <a:dk2>
-        <a:srgbClr val="5B2315"/>
+        <a:srgbClr val="492E27"/>
       </a:dk2>
       <a:lt2>
-        <a:srgbClr val="FBF1EE"/>
+        <a:srgbClr val="FBEFEC"/>
       </a:lt2>
       <a:accent1>
-        <a:srgbClr val="AE4329"/>
+        <a:srgbClr val="D88C79"/>
       </a:accent1>
       <a:accent2>
-        <a:srgbClr val="3B9177"/>
+        <a:srgbClr val="E1C998"/>
       </a:accent2>
       <a:accent3>
-        <a:srgbClr val="5B2315"/>
+        <a:srgbClr val="492E27"/>
       </a:accent3>
       <a:accent4>
-        <a:srgbClr val="F5D4CC"/>
+        <a:srgbClr val="F6DCD5"/>
       </a:accent4>
       <a:accent5>
-        <a:srgbClr val="746A50"/>
+        <a:srgbClr val="DCAA88"/>
       </a:accent5>
       <a:accent6>
-        <a:srgbClr val="9D7B73"/>
+        <a:srgbClr val="92827D"/>
       </a:accent6>
       <a:hlink>
-        <a:srgbClr val="AE4329"/>
+        <a:srgbClr val="D88C79"/>
       </a:hlink>
       <a:folHlink>
-        <a:srgbClr val="5B2315"/>
+        <a:srgbClr val="492E27"/>
       </a:folHlink>
     </a:clrScheme>
     <a:fontScheme name="Office">
